--- a/Lab5.pptx
+++ b/Lab5.pptx
@@ -117,6 +117,35 @@
     </p:ext>
   </p:extLst>
 </p:presentation>
+</file>
+
+<file path=ppt/changesInfos/changesInfo1.xml><?xml version="1.0" encoding="utf-8"?>
+<pc:chgInfo xmlns:a="http://schemas.openxmlformats.org/drawingml/2006/main" xmlns:r="http://schemas.openxmlformats.org/officeDocument/2006/relationships" xmlns:ac="http://schemas.microsoft.com/office/drawing/2013/main/command" xmlns:pc="http://schemas.microsoft.com/office/powerpoint/2013/main/command">
+  <pc:docChgLst>
+    <pc:chgData name="Khattab, Sherif" userId="c83b1e15-36f3-4f46-aceb-05aac24c545e" providerId="ADAL" clId="{B2C8D054-599B-4C00-9522-071D53A47A2D}"/>
+    <pc:docChg chg="modSld">
+      <pc:chgData name="Khattab, Sherif" userId="c83b1e15-36f3-4f46-aceb-05aac24c545e" providerId="ADAL" clId="{B2C8D054-599B-4C00-9522-071D53A47A2D}" dt="2022-10-04T16:20:21.197" v="1" actId="20577"/>
+      <pc:docMkLst>
+        <pc:docMk/>
+      </pc:docMkLst>
+      <pc:sldChg chg="modSp mod">
+        <pc:chgData name="Khattab, Sherif" userId="c83b1e15-36f3-4f46-aceb-05aac24c545e" providerId="ADAL" clId="{B2C8D054-599B-4C00-9522-071D53A47A2D}" dt="2022-10-04T16:20:21.197" v="1" actId="20577"/>
+        <pc:sldMkLst>
+          <pc:docMk/>
+          <pc:sldMk cId="1845323539" sldId="256"/>
+        </pc:sldMkLst>
+        <pc:spChg chg="mod">
+          <ac:chgData name="Khattab, Sherif" userId="c83b1e15-36f3-4f46-aceb-05aac24c545e" providerId="ADAL" clId="{B2C8D054-599B-4C00-9522-071D53A47A2D}" dt="2022-10-04T16:20:21.197" v="1" actId="20577"/>
+          <ac:spMkLst>
+            <pc:docMk/>
+            <pc:sldMk cId="1845323539" sldId="256"/>
+            <ac:spMk id="2" creationId="{00000000-0000-0000-0000-000000000000}"/>
+          </ac:spMkLst>
+        </pc:spChg>
+      </pc:sldChg>
+    </pc:docChg>
+  </pc:docChgLst>
+</pc:chgInfo>
 </file>
 
 <file path=ppt/diagrams/colors1.xml><?xml version="1.0" encoding="utf-8"?>
@@ -4006,7 +4035,7 @@
           <a:p>
             <a:fld id="{A72D157F-DC7D-457B-86F2-B8FA8FF7BDF8}" type="datetimeFigureOut">
               <a:rPr lang="en-US" smtClean="0"/>
-              <a:t>2/9/18</a:t>
+              <a:t>10/4/2022</a:t>
             </a:fld>
             <a:endParaRPr lang="en-US"/>
           </a:p>
@@ -4252,7 +4281,7 @@
           <a:p>
             <a:fld id="{A72D157F-DC7D-457B-86F2-B8FA8FF7BDF8}" type="datetimeFigureOut">
               <a:rPr lang="en-US" smtClean="0"/>
-              <a:t>2/9/18</a:t>
+              <a:t>10/4/2022</a:t>
             </a:fld>
             <a:endParaRPr lang="en-US"/>
           </a:p>
@@ -4561,7 +4590,7 @@
           <a:p>
             <a:fld id="{A72D157F-DC7D-457B-86F2-B8FA8FF7BDF8}" type="datetimeFigureOut">
               <a:rPr lang="en-US" smtClean="0"/>
-              <a:t>2/9/18</a:t>
+              <a:t>10/4/2022</a:t>
             </a:fld>
             <a:endParaRPr lang="en-US"/>
           </a:p>
@@ -4889,7 +4918,7 @@
           <a:p>
             <a:fld id="{A72D157F-DC7D-457B-86F2-B8FA8FF7BDF8}" type="datetimeFigureOut">
               <a:rPr lang="en-US" smtClean="0"/>
-              <a:t>2/9/18</a:t>
+              <a:t>10/4/2022</a:t>
             </a:fld>
             <a:endParaRPr lang="en-US"/>
           </a:p>
@@ -5198,7 +5227,7 @@
           <a:p>
             <a:fld id="{A72D157F-DC7D-457B-86F2-B8FA8FF7BDF8}" type="datetimeFigureOut">
               <a:rPr lang="en-US" smtClean="0"/>
-              <a:t>2/9/18</a:t>
+              <a:t>10/4/2022</a:t>
             </a:fld>
             <a:endParaRPr lang="en-US"/>
           </a:p>
@@ -5586,7 +5615,7 @@
           <a:p>
             <a:fld id="{A72D157F-DC7D-457B-86F2-B8FA8FF7BDF8}" type="datetimeFigureOut">
               <a:rPr lang="en-US" smtClean="0"/>
-              <a:t>2/9/18</a:t>
+              <a:t>10/4/2022</a:t>
             </a:fld>
             <a:endParaRPr lang="en-US"/>
           </a:p>
@@ -5751,7 +5780,7 @@
           <a:p>
             <a:fld id="{A72D157F-DC7D-457B-86F2-B8FA8FF7BDF8}" type="datetimeFigureOut">
               <a:rPr lang="en-US" smtClean="0"/>
-              <a:t>2/9/18</a:t>
+              <a:t>10/4/2022</a:t>
             </a:fld>
             <a:endParaRPr lang="en-US"/>
           </a:p>
@@ -5926,7 +5955,7 @@
           <a:p>
             <a:fld id="{A72D157F-DC7D-457B-86F2-B8FA8FF7BDF8}" type="datetimeFigureOut">
               <a:rPr lang="en-US" smtClean="0"/>
-              <a:t>2/9/18</a:t>
+              <a:t>10/4/2022</a:t>
             </a:fld>
             <a:endParaRPr lang="en-US"/>
           </a:p>
@@ -6091,7 +6120,7 @@
           <a:p>
             <a:fld id="{A72D157F-DC7D-457B-86F2-B8FA8FF7BDF8}" type="datetimeFigureOut">
               <a:rPr lang="en-US" smtClean="0"/>
-              <a:t>2/9/18</a:t>
+              <a:t>10/4/2022</a:t>
             </a:fld>
             <a:endParaRPr lang="en-US"/>
           </a:p>
@@ -6333,7 +6362,7 @@
           <a:p>
             <a:fld id="{A72D157F-DC7D-457B-86F2-B8FA8FF7BDF8}" type="datetimeFigureOut">
               <a:rPr lang="en-US" smtClean="0"/>
-              <a:t>2/9/18</a:t>
+              <a:t>10/4/2022</a:t>
             </a:fld>
             <a:endParaRPr lang="en-US"/>
           </a:p>
@@ -6560,7 +6589,7 @@
           <a:p>
             <a:fld id="{A72D157F-DC7D-457B-86F2-B8FA8FF7BDF8}" type="datetimeFigureOut">
               <a:rPr lang="en-US" smtClean="0"/>
-              <a:t>2/9/18</a:t>
+              <a:t>10/4/2022</a:t>
             </a:fld>
             <a:endParaRPr lang="en-US"/>
           </a:p>
@@ -6929,7 +6958,7 @@
           <a:p>
             <a:fld id="{A72D157F-DC7D-457B-86F2-B8FA8FF7BDF8}" type="datetimeFigureOut">
               <a:rPr lang="en-US" smtClean="0"/>
-              <a:t>2/9/18</a:t>
+              <a:t>10/4/2022</a:t>
             </a:fld>
             <a:endParaRPr lang="en-US"/>
           </a:p>
@@ -7047,7 +7076,7 @@
           <a:p>
             <a:fld id="{A72D157F-DC7D-457B-86F2-B8FA8FF7BDF8}" type="datetimeFigureOut">
               <a:rPr lang="en-US" smtClean="0"/>
-              <a:t>2/9/18</a:t>
+              <a:t>10/4/2022</a:t>
             </a:fld>
             <a:endParaRPr lang="en-US"/>
           </a:p>
@@ -7137,7 +7166,7 @@
           <a:p>
             <a:fld id="{A72D157F-DC7D-457B-86F2-B8FA8FF7BDF8}" type="datetimeFigureOut">
               <a:rPr lang="en-US" smtClean="0"/>
-              <a:t>2/9/18</a:t>
+              <a:t>10/4/2022</a:t>
             </a:fld>
             <a:endParaRPr lang="en-US"/>
           </a:p>
@@ -7387,7 +7416,7 @@
           <a:p>
             <a:fld id="{A72D157F-DC7D-457B-86F2-B8FA8FF7BDF8}" type="datetimeFigureOut">
               <a:rPr lang="en-US" smtClean="0"/>
-              <a:t>2/9/18</a:t>
+              <a:t>10/4/2022</a:t>
             </a:fld>
             <a:endParaRPr lang="en-US"/>
           </a:p>
@@ -7687,7 +7716,7 @@
           <a:p>
             <a:fld id="{A72D157F-DC7D-457B-86F2-B8FA8FF7BDF8}" type="datetimeFigureOut">
               <a:rPr lang="en-US" smtClean="0"/>
-              <a:t>2/9/18</a:t>
+              <a:t>10/4/2022</a:t>
             </a:fld>
             <a:endParaRPr lang="en-US"/>
           </a:p>
@@ -8383,7 +8412,7 @@
             <a:fld id="{A72D157F-DC7D-457B-86F2-B8FA8FF7BDF8}" type="datetimeFigureOut">
               <a:rPr lang="en-US" smtClean="0"/>
               <a:pPr/>
-              <a:t>2/9/18</a:t>
+              <a:t>10/4/2022</a:t>
             </a:fld>
             <a:endParaRPr lang="en-US"/>
           </a:p>
@@ -8930,8 +8959,12 @@
           <a:p>
             <a:pPr algn="ctr"/>
             <a:r>
+              <a:rPr lang="en-US"/>
+              <a:t>CS </a:t>
+            </a:r>
+            <a:r>
               <a:rPr lang="en-US" dirty="0"/>
-              <a:t>CS/COE 445 Data Structures </a:t>
+              <a:t>445 Data Structures </a:t>
             </a:r>
           </a:p>
         </p:txBody>
